--- a/20261007-cctsi/deck-16x9.pptx
+++ b/20261007-cctsi/deck-16x9.pptx
@@ -6607,7 +6607,7 @@
                 <a:ea typeface="BIZ UDPGothic" pitchFamily="34" charset="-122"/>
                 <a:cs typeface="BIZ UDPGothic" pitchFamily="34" charset="-120"/>
               </a:rPr>
-              <a:t>Revised</a:t>
+              <a:t>No office</a:t>
             </a:r>
             <a:endParaRPr lang="ja-JP" sz="2000" dirty="0"/>
           </a:p>
@@ -6651,7 +6651,7 @@
                 <a:ea typeface="BIZ UDPGothic" pitchFamily="34" charset="-122"/>
                 <a:cs typeface="BIZ UDPGothic" pitchFamily="34" charset="-120"/>
               </a:rPr>
-              <a:t>A points system was approved in August 2026; it applies from fiscal 2027.</a:t>
+              <a:t>No national program office sets goals. The criteria are the whole instrument.</a:t>
             </a:r>
             <a:endParaRPr lang="ja-JP" sz="2000" dirty="0"/>
           </a:p>
@@ -6806,7 +6806,7 @@
                 <a:ea typeface="BIZ UDPGothic" pitchFamily="34" charset="-122"/>
                 <a:cs typeface="BIZ UDPGothic" pitchFamily="34" charset="-120"/>
               </a:rPr>
-              <a:t>Three-year in-house counts decide approval. Support to other institutions is a floor, not a score.</a:t>
+              <a:t>Three-year counts, in principle in-house, decide approval. Support to others is a floor, not a score.</a:t>
             </a:r>
             <a:endParaRPr lang="ja-JP" sz="2000" dirty="0"/>
           </a:p>
@@ -6894,7 +6894,7 @@
                 <a:ea typeface="BIZ UDPGothic" pitchFamily="34" charset="-122"/>
                 <a:cs typeface="BIZ UDPGothic" pitchFamily="34" charset="-120"/>
               </a:rPr>
-              <a:t>Drug-approval trials led by the hospital's own PI, or 4 plus 40 other trials.</a:t>
+              <a:t>Drug-approval trials, or 4 plus 40 others. In principle led by the hospital's own PI.</a:t>
             </a:r>
             <a:endParaRPr lang="ja-JP" sz="2000" dirty="0"/>
           </a:p>
@@ -6982,7 +6982,7 @@
                 <a:ea typeface="BIZ UDPGothic" pitchFamily="34" charset="-122"/>
                 <a:cs typeface="BIZ UDPGothic" pitchFamily="34" charset="-120"/>
               </a:rPr>
-              <a:t>Peer-reviewed English papers, in principle with a first author from the hospital itself.</a:t>
+              <a:t>Peer-reviewed English papers. In principle the first author is from the hospital.</a:t>
             </a:r>
             <a:endParaRPr lang="ja-JP" sz="2000" dirty="0"/>
           </a:p>
@@ -7070,7 +7070,7 @@
                 <a:ea typeface="BIZ UDPGothic" pitchFamily="34" charset="-122"/>
                 <a:cs typeface="BIZ UDPGothic" pitchFamily="34" charset="-120"/>
               </a:rPr>
-              <a:t>Support to other institutions is a fixed floor. Doing more earns nothing.</a:t>
+              <a:t>A fixed floor. Beyond it, only full support counts: protocol, DM and monitoring.</a:t>
             </a:r>
             <a:endParaRPr lang="ja-JP" sz="2000" dirty="0"/>
           </a:p>
@@ -7489,7 +7489,7 @@
                 <a:ea typeface="BIZ UDPGothic" pitchFamily="34" charset="-122"/>
                 <a:cs typeface="BIZ UDPGothic" pitchFamily="34" charset="-120"/>
               </a:rPr>
-              <a:t>The 2026 revision keeps support as a floor; its effort was judged too hard to score.</a:t>
+              <a:t>The 2026 review keeps support as a floor; its effort was judged too hard to score.</a:t>
             </a:r>
             <a:endParaRPr lang="ja-JP" sz="2000" dirty="0"/>
           </a:p>

--- a/20261007-cctsi/deck-16x9.pptx
+++ b/20261007-cctsi/deck-16x9.pptx
@@ -15,10 +15,9 @@
     <p:sldId id="263" r:id="rId9"/>
     <p:sldId id="264" r:id="rId10"/>
     <p:sldId id="265" r:id="rId11"/>
-    <p:sldId id="266" r:id="rId12"/>
   </p:sldIdLst>
   <p:notesMasterIdLst>
-    <p:notesMasterId r:id="rId13"/>
+    <p:notesMasterId r:id="rId12"/>
   </p:notesMasterIdLst>
   <p:sldSz cx="12192000" cy="6858000"/>
   <p:notesSz cx="6858000" cy="12192000"/>
@@ -642,94 +641,6 @@
 </p:notes>
 </file>
 
-<file path=ppt/notesSlides/notesSlide11.xml><?xml version="1.0" encoding="utf-8"?>
-<p:notes xmlns:a="http://schemas.openxmlformats.org/drawingml/2006/main" xmlns:r="http://schemas.openxmlformats.org/officeDocument/2006/relationships" xmlns:p="http://schemas.openxmlformats.org/presentationml/2006/main">
-  <p:cSld>
-    <p:spTree>
-      <p:nvGrpSpPr>
-        <p:cNvPr id="1" name=""/>
-        <p:cNvGrpSpPr/>
-        <p:nvPr/>
-      </p:nvGrpSpPr>
-      <p:grpSpPr>
-        <a:xfrm>
-          <a:off x="0" y="0"/>
-          <a:ext cx="0" cy="0"/>
-          <a:chOff x="0" y="0"/>
-          <a:chExt cx="0" cy="0"/>
-        </a:xfrm>
-      </p:grpSpPr>
-      <p:sp>
-        <p:nvSpPr>
-          <p:cNvPr id="2" name="Slide Image Placeholder 1"/>
-          <p:cNvSpPr>
-            <a:spLocks noGrp="1" noRot="1" noChangeAspect="1"/>
-          </p:cNvSpPr>
-          <p:nvPr>
-            <p:ph type="sldImg"/>
-          </p:nvPr>
-        </p:nvSpPr>
-        <p:spPr/>
-      </p:sp>
-      <p:sp>
-        <p:nvSpPr>
-          <p:cNvPr id="3" name="Notes Placeholder 2"/>
-          <p:cNvSpPr>
-            <a:spLocks noGrp="1"/>
-          </p:cNvSpPr>
-          <p:nvPr>
-            <p:ph type="body" idx="1"/>
-          </p:nvPr>
-        </p:nvSpPr>
-        <p:spPr/>
-        <p:txBody>
-          <a:bodyPr/>
-          <a:lstStyle/>
-          <a:p>
-            <a:r>
-              <a:rPr lang="en-US" dirty="0"/>
-              <a:t>Design system: UTokyo CRPC Slide System 1.1.0。内容の正本は制作元のcontent.json。本文の自動縮小は禁止。</a:t>
-            </a:r>
-            <a:endParaRPr lang="en-US" dirty="0"/>
-          </a:p>
-        </p:txBody>
-      </p:sp>
-      <p:sp>
-        <p:nvSpPr>
-          <p:cNvPr id="4" name="Slide Number Placeholder 3"/>
-          <p:cNvSpPr>
-            <a:spLocks noGrp="1"/>
-          </p:cNvSpPr>
-          <p:nvPr>
-            <p:ph type="sldNum" sz="quarter" idx="10"/>
-          </p:nvPr>
-        </p:nvSpPr>
-        <p:spPr/>
-        <p:txBody>
-          <a:bodyPr/>
-          <a:lstStyle/>
-          <a:p>
-            <a:fld id="{F7021451-1387-4CA6-816F-3879F97B5CBC}" type="slidenum">
-              <a:rPr lang="en-US"/>
-              <a:t>11</a:t>
-            </a:fld>
-            <a:endParaRPr lang="en-US"/>
-          </a:p>
-        </p:txBody>
-      </p:sp>
-    </p:spTree>
-    <p:extLst>
-      <p:ext uri="{BB962C8B-B14F-4D97-AF65-F5344CB8AC3E}">
-        <p14:creationId xmlns:p14="http://schemas.microsoft.com/office/powerpoint/2010/main" val="1024086991"/>
-      </p:ext>
-    </p:extLst>
-  </p:cSld>
-  <p:clrMapOvr>
-    <a:masterClrMapping/>
-  </p:clrMapOvr>
-</p:notes>
-</file>
-
 <file path=ppt/notesSlides/notesSlide2.xml><?xml version="1.0" encoding="utf-8"?>
 <p:notes xmlns:a="http://schemas.openxmlformats.org/drawingml/2006/main" xmlns:r="http://schemas.openxmlformats.org/officeDocument/2006/relationships" xmlns:p="http://schemas.openxmlformats.org/presentationml/2006/main">
   <p:cSld>
@@ -3448,7 +3359,7 @@
                 <a:ea typeface="BIZ UDPGothic" pitchFamily="34" charset="-122"/>
                 <a:cs typeface="BIZ UDPGothic" pitchFamily="34" charset="-120"/>
               </a:rPr>
-              <a:t>From trial counts</a:t>
+              <a:t>From trials started</a:t>
             </a:r>
             <a:endParaRPr lang="ja-JP" sz="2000" dirty="0"/>
           </a:p>
@@ -3468,7 +3379,7 @@
                 <a:ea typeface="BIZ UDPGothic" pitchFamily="34" charset="-122"/>
                 <a:cs typeface="BIZ UDPGothic" pitchFamily="34" charset="-120"/>
               </a:rPr>
-              <a:t>to approvals.</a:t>
+              <a:t>to results.</a:t>
             </a:r>
             <a:endParaRPr lang="ja-JP" sz="2000" dirty="0"/>
           </a:p>
@@ -4721,51 +4632,227 @@
       </p:grpSpPr>
       <p:sp>
         <p:nvSpPr>
-          <p:cNvPr id="2" name="Text 2"/>
-          <p:cNvSpPr/>
-          <p:nvPr>
-            <p:ph idx="102" type="title" hasCustomPrompt="1"/>
-          </p:nvPr>
-        </p:nvSpPr>
-        <p:spPr>
-          <a:xfrm>
-            <a:off x="609600" y="317500"/>
-            <a:ext cx="10972800" cy="609600"/>
-          </a:xfrm>
-          <a:prstGeom prst="rect">
-            <a:avLst/>
-          </a:prstGeom>
-          <a:noFill/>
-          <a:ln/>
-        </p:spPr>
-        <p:txBody>
-          <a:bodyPr wrap="square" lIns="0" tIns="0" rIns="0" bIns="0" rtlCol="0" anchor="t"/>
-          <a:lstStyle/>
-          <a:p>
-            <a:pPr algn="l" indent="0" marL="0">
-              <a:lnSpc>
-                <a:spcPct val="130000"/>
-              </a:lnSpc>
-              <a:buNone/>
-            </a:pPr>
-            <a:r>
-              <a:rPr lang="ja-JP" altLang="en-US" sz="2600" b="1" dirty="0">
-                <a:solidFill>
-                  <a:srgbClr val="293E46"/>
-                </a:solidFill>
-                <a:latin typeface="BIZ UDPGothic" pitchFamily="34" charset="0"/>
-                <a:ea typeface="BIZ UDPGothic" pitchFamily="34" charset="-122"/>
-                <a:cs typeface="BIZ UDPGothic" pitchFamily="34" charset="-120"/>
-              </a:rPr>
-              <a:t>What we most want to learn</a:t>
-            </a:r>
-            <a:endParaRPr lang="ja-JP" sz="2600" dirty="0"/>
-          </a:p>
-        </p:txBody>
-      </p:sp>
-      <p:sp>
-        <p:nvSpPr>
-          <p:cNvPr id="3" name="Text 1"/>
+          <p:cNvPr id="2" name="Text 6"/>
+          <p:cNvSpPr/>
+          <p:nvPr>
+            <p:ph idx="107" type="title" hasCustomPrompt="1"/>
+          </p:nvPr>
+        </p:nvSpPr>
+        <p:spPr>
+          <a:xfrm>
+            <a:off x="1016000" y="2667000"/>
+            <a:ext cx="10160000" cy="736600"/>
+          </a:xfrm>
+          <a:prstGeom prst="rect">
+            <a:avLst/>
+          </a:prstGeom>
+          <a:noFill/>
+          <a:ln/>
+        </p:spPr>
+        <p:txBody>
+          <a:bodyPr wrap="square" lIns="0" tIns="0" rIns="0" bIns="0" rtlCol="0" anchor="t"/>
+          <a:lstStyle/>
+          <a:p>
+            <a:pPr algn="l" indent="0" marL="0">
+              <a:lnSpc>
+                <a:spcPct val="120000"/>
+              </a:lnSpc>
+              <a:buNone/>
+            </a:pPr>
+            <a:r>
+              <a:rPr lang="ja-JP" altLang="en-US" sz="3800" b="1" dirty="0">
+                <a:solidFill>
+                  <a:srgbClr val="293E46"/>
+                </a:solidFill>
+                <a:latin typeface="BIZ UDPGothic" pitchFamily="34" charset="0"/>
+                <a:ea typeface="BIZ UDPGothic" pitchFamily="34" charset="-122"/>
+                <a:cs typeface="BIZ UDPGothic" pitchFamily="34" charset="-120"/>
+              </a:rPr>
+              <a:t>Thank you</a:t>
+            </a:r>
+            <a:endParaRPr lang="ja-JP" sz="3800" dirty="0"/>
+          </a:p>
+        </p:txBody>
+      </p:sp>
+      <p:sp>
+        <p:nvSpPr>
+          <p:cNvPr id="3" name="Text 6"/>
+          <p:cNvSpPr/>
+          <p:nvPr>
+            <p:ph idx="108" type="body" hasCustomPrompt="1"/>
+          </p:nvPr>
+        </p:nvSpPr>
+        <p:spPr>
+          <a:xfrm>
+            <a:off x="1028700" y="3632200"/>
+            <a:ext cx="10134600" cy="457200"/>
+          </a:xfrm>
+          <a:prstGeom prst="rect">
+            <a:avLst/>
+          </a:prstGeom>
+          <a:noFill/>
+          <a:ln/>
+        </p:spPr>
+        <p:txBody>
+          <a:bodyPr wrap="square" lIns="0" tIns="0" rIns="0" bIns="0" rtlCol="0" anchor="t"/>
+          <a:lstStyle/>
+          <a:p>
+            <a:pPr algn="l" indent="0" marL="0">
+              <a:lnSpc>
+                <a:spcPct val="135000"/>
+              </a:lnSpc>
+              <a:buNone/>
+            </a:pPr>
+            <a:r>
+              <a:rPr lang="ja-JP" altLang="en-US" sz="2200" dirty="0">
+                <a:solidFill>
+                  <a:srgbClr val="293E46"/>
+                </a:solidFill>
+                <a:latin typeface="BIZ UDPGothic" pitchFamily="34" charset="0"/>
+                <a:ea typeface="BIZ UDPGothic" pitchFamily="34" charset="-122"/>
+                <a:cs typeface="BIZ UDPGothic" pitchFamily="34" charset="-120"/>
+              </a:rPr>
+              <a:t>toshikisaito@g.ecc.u-tokyo.ac.jp</a:t>
+            </a:r>
+            <a:endParaRPr lang="ja-JP" sz="2200" dirty="0"/>
+          </a:p>
+        </p:txBody>
+      </p:sp>
+      <p:sp>
+        <p:nvSpPr>
+          <p:cNvPr id="4" name="Text 8"/>
+          <p:cNvSpPr/>
+          <p:nvPr>
+            <p:ph idx="111" type="body" hasCustomPrompt="1"/>
+          </p:nvPr>
+        </p:nvSpPr>
+        <p:spPr>
+          <a:xfrm>
+            <a:off x="609600" y="5435600"/>
+            <a:ext cx="3810000" cy="330200"/>
+          </a:xfrm>
+          <a:prstGeom prst="rect">
+            <a:avLst/>
+          </a:prstGeom>
+          <a:noFill/>
+          <a:ln/>
+        </p:spPr>
+        <p:txBody>
+          <a:bodyPr wrap="square" lIns="0" tIns="0" rIns="0" bIns="0" rtlCol="0" anchor="t"/>
+          <a:lstStyle/>
+          <a:p>
+            <a:pPr algn="l" indent="0" marL="0">
+              <a:lnSpc>
+                <a:spcPct val="135000"/>
+              </a:lnSpc>
+              <a:buNone/>
+            </a:pPr>
+            <a:r>
+              <a:rPr lang="ja-JP" altLang="en-US" sz="1700" b="1" dirty="0">
+                <a:solidFill>
+                  <a:srgbClr val="293E46"/>
+                </a:solidFill>
+                <a:latin typeface="BIZ UDPGothic" pitchFamily="34" charset="0"/>
+                <a:ea typeface="BIZ UDPGothic" pitchFamily="34" charset="-122"/>
+                <a:cs typeface="BIZ UDPGothic" pitchFamily="34" charset="-120"/>
+              </a:rPr>
+              <a:t>T. Saito</a:t>
+            </a:r>
+            <a:endParaRPr lang="ja-JP" sz="1700" dirty="0"/>
+          </a:p>
+        </p:txBody>
+      </p:sp>
+      <p:sp>
+        <p:nvSpPr>
+          <p:cNvPr id="5" name="Text 8"/>
+          <p:cNvSpPr/>
+          <p:nvPr>
+            <p:ph idx="112" type="body" hasCustomPrompt="1"/>
+          </p:nvPr>
+        </p:nvSpPr>
+        <p:spPr>
+          <a:xfrm>
+            <a:off x="609600" y="5791200"/>
+            <a:ext cx="8001000" cy="279400"/>
+          </a:xfrm>
+          <a:prstGeom prst="rect">
+            <a:avLst/>
+          </a:prstGeom>
+          <a:noFill/>
+          <a:ln/>
+        </p:spPr>
+        <p:txBody>
+          <a:bodyPr wrap="square" lIns="0" tIns="0" rIns="0" bIns="0" rtlCol="0" anchor="t"/>
+          <a:lstStyle/>
+          <a:p>
+            <a:pPr algn="l" indent="0" marL="0">
+              <a:lnSpc>
+                <a:spcPct val="135000"/>
+              </a:lnSpc>
+              <a:buNone/>
+            </a:pPr>
+            <a:r>
+              <a:rPr lang="ja-JP" altLang="en-US" sz="1200" dirty="0">
+                <a:solidFill>
+                  <a:srgbClr val="64777D"/>
+                </a:solidFill>
+                <a:latin typeface="BIZ UDPGothic" pitchFamily="34" charset="0"/>
+                <a:ea typeface="BIZ UDPGothic" pitchFamily="34" charset="-122"/>
+                <a:cs typeface="BIZ UDPGothic" pitchFamily="34" charset="-120"/>
+              </a:rPr>
+              <a:t>CRPC, UTokyo Hospital</a:t>
+            </a:r>
+            <a:endParaRPr lang="ja-JP" sz="1200" dirty="0"/>
+          </a:p>
+        </p:txBody>
+      </p:sp>
+      <p:sp>
+        <p:nvSpPr>
+          <p:cNvPr id="6" name="Text 8"/>
+          <p:cNvSpPr/>
+          <p:nvPr>
+            <p:ph idx="113" type="body" hasCustomPrompt="1"/>
+          </p:nvPr>
+        </p:nvSpPr>
+        <p:spPr>
+          <a:xfrm>
+            <a:off x="8915400" y="5486400"/>
+            <a:ext cx="2667000" cy="304800"/>
+          </a:xfrm>
+          <a:prstGeom prst="rect">
+            <a:avLst/>
+          </a:prstGeom>
+          <a:noFill/>
+          <a:ln/>
+        </p:spPr>
+        <p:txBody>
+          <a:bodyPr wrap="square" lIns="0" tIns="0" rIns="0" bIns="0" rtlCol="0" anchor="t"/>
+          <a:lstStyle/>
+          <a:p>
+            <a:pPr algn="r" indent="0" marL="0">
+              <a:lnSpc>
+                <a:spcPct val="135000"/>
+              </a:lnSpc>
+              <a:buNone/>
+            </a:pPr>
+            <a:r>
+              <a:rPr lang="ja-JP" altLang="en-US" sz="1200" dirty="0">
+                <a:solidFill>
+                  <a:srgbClr val="64777D"/>
+                </a:solidFill>
+                <a:latin typeface="BIZ UDPGothic" pitchFamily="34" charset="0"/>
+                <a:ea typeface="BIZ UDPGothic" pitchFamily="34" charset="-122"/>
+                <a:cs typeface="BIZ UDPGothic" pitchFamily="34" charset="-120"/>
+              </a:rPr>
+              <a:t>Durham · Aurora · Nashville</a:t>
+            </a:r>
+            <a:endParaRPr lang="ja-JP" sz="1200" dirty="0"/>
+          </a:p>
+        </p:txBody>
+      </p:sp>
+      <p:sp>
+        <p:nvSpPr>
+          <p:cNvPr id="7" name="Text 5"/>
           <p:cNvSpPr/>
           <p:nvPr/>
         </p:nvSpPr>
@@ -4800,601 +4887,6 @@
                 <a:cs typeface="Arial" pitchFamily="34" charset="-120"/>
               </a:rPr>
               <a:t>10</a:t>
-            </a:r>
-            <a:endParaRPr lang="ja-JP" sz="1000" dirty="0"/>
-          </a:p>
-        </p:txBody>
-      </p:sp>
-      <p:sp>
-        <p:nvSpPr>
-          <p:cNvPr id="4" name="Text 5"/>
-          <p:cNvSpPr/>
-          <p:nvPr>
-            <p:ph idx="106" type="body" hasCustomPrompt="1"/>
-          </p:nvPr>
-        </p:nvSpPr>
-        <p:spPr>
-          <a:xfrm>
-            <a:off x="609600" y="1371600"/>
-            <a:ext cx="10972800" cy="762000"/>
-          </a:xfrm>
-          <a:prstGeom prst="rect">
-            <a:avLst/>
-          </a:prstGeom>
-          <a:noFill/>
-          <a:ln/>
-        </p:spPr>
-        <p:txBody>
-          <a:bodyPr wrap="square" lIns="0" tIns="0" rIns="0" bIns="0" rtlCol="0" anchor="t"/>
-          <a:lstStyle/>
-          <a:p>
-            <a:pPr algn="l" indent="0" marL="0">
-              <a:lnSpc>
-                <a:spcPct val="135000"/>
-              </a:lnSpc>
-              <a:buNone/>
-            </a:pPr>
-            <a:r>
-              <a:rPr lang="ja-JP" altLang="en-US" sz="2000" dirty="0">
-                <a:solidFill>
-                  <a:srgbClr val="64777D"/>
-                </a:solidFill>
-                <a:latin typeface="BIZ UDPGothic" pitchFamily="34" charset="0"/>
-                <a:ea typeface="BIZ UDPGothic" pitchFamily="34" charset="-122"/>
-                <a:cs typeface="BIZ UDPGothic" pitchFamily="34" charset="-120"/>
-              </a:rPr>
-              <a:t>One question is about the review; two are specific to you.</a:t>
-            </a:r>
-            <a:endParaRPr lang="ja-JP" sz="2000" dirty="0"/>
-          </a:p>
-        </p:txBody>
-      </p:sp>
-      <p:sp>
-        <p:nvSpPr>
-          <p:cNvPr id="5" name="Text 7"/>
-          <p:cNvSpPr/>
-          <p:nvPr>
-            <p:ph idx="109" type="body" hasCustomPrompt="1"/>
-          </p:nvPr>
-        </p:nvSpPr>
-        <p:spPr>
-          <a:xfrm>
-            <a:off x="1270000" y="2438400"/>
-            <a:ext cx="2159000" cy="381000"/>
-          </a:xfrm>
-          <a:prstGeom prst="rect">
-            <a:avLst/>
-          </a:prstGeom>
-          <a:noFill/>
-          <a:ln/>
-        </p:spPr>
-        <p:txBody>
-          <a:bodyPr wrap="square" lIns="0" tIns="0" rIns="0" bIns="0" rtlCol="0" anchor="t"/>
-          <a:lstStyle/>
-          <a:p>
-            <a:pPr algn="l" indent="0" marL="0">
-              <a:lnSpc>
-                <a:spcPct val="135000"/>
-              </a:lnSpc>
-              <a:buNone/>
-            </a:pPr>
-            <a:r>
-              <a:rPr lang="ja-JP" altLang="en-US" sz="2000" b="1" dirty="0">
-                <a:solidFill>
-                  <a:srgbClr val="293E46"/>
-                </a:solidFill>
-                <a:latin typeface="BIZ UDPGothic" pitchFamily="34" charset="0"/>
-                <a:ea typeface="BIZ UDPGothic" pitchFamily="34" charset="-122"/>
-                <a:cs typeface="BIZ UDPGothic" pitchFamily="34" charset="-120"/>
-              </a:rPr>
-              <a:t>Review</a:t>
-            </a:r>
-            <a:endParaRPr lang="ja-JP" sz="2000" dirty="0"/>
-          </a:p>
-        </p:txBody>
-      </p:sp>
-      <p:sp>
-        <p:nvSpPr>
-          <p:cNvPr id="6" name="Text 7"/>
-          <p:cNvSpPr/>
-          <p:nvPr>
-            <p:ph idx="110" type="body" hasCustomPrompt="1"/>
-          </p:nvPr>
-        </p:nvSpPr>
-        <p:spPr>
-          <a:xfrm>
-            <a:off x="3683000" y="2438400"/>
-            <a:ext cx="7645400" cy="812800"/>
-          </a:xfrm>
-          <a:prstGeom prst="rect">
-            <a:avLst/>
-          </a:prstGeom>
-          <a:noFill/>
-          <a:ln/>
-        </p:spPr>
-        <p:txBody>
-          <a:bodyPr wrap="square" lIns="0" tIns="0" rIns="0" bIns="0" rtlCol="0" anchor="t"/>
-          <a:lstStyle/>
-          <a:p>
-            <a:pPr algn="l" indent="0" marL="0">
-              <a:lnSpc>
-                <a:spcPct val="135000"/>
-              </a:lnSpc>
-              <a:buNone/>
-            </a:pPr>
-            <a:r>
-              <a:rPr lang="ja-JP" altLang="en-US" sz="2000" dirty="0">
-                <a:solidFill>
-                  <a:srgbClr val="293E46"/>
-                </a:solidFill>
-                <a:latin typeface="BIZ UDPGothic" pitchFamily="34" charset="0"/>
-                <a:ea typeface="BIZ UDPGothic" pitchFamily="34" charset="-122"/>
-                <a:cs typeface="BIZ UDPGothic" pitchFamily="34" charset="-120"/>
-              </a:rPr>
-              <a:t>What decided your last renewal; which report numbers has NCATS acted on?</a:t>
-            </a:r>
-            <a:endParaRPr lang="ja-JP" sz="2000" dirty="0"/>
-          </a:p>
-        </p:txBody>
-      </p:sp>
-      <p:sp>
-        <p:nvSpPr>
-          <p:cNvPr id="7" name="Text 9"/>
-          <p:cNvSpPr/>
-          <p:nvPr>
-            <p:ph idx="113" type="body" hasCustomPrompt="1"/>
-          </p:nvPr>
-        </p:nvSpPr>
-        <p:spPr>
-          <a:xfrm>
-            <a:off x="1270000" y="3810000"/>
-            <a:ext cx="2159000" cy="381000"/>
-          </a:xfrm>
-          <a:prstGeom prst="rect">
-            <a:avLst/>
-          </a:prstGeom>
-          <a:noFill/>
-          <a:ln/>
-        </p:spPr>
-        <p:txBody>
-          <a:bodyPr wrap="square" lIns="0" tIns="0" rIns="0" bIns="0" rtlCol="0" anchor="t"/>
-          <a:lstStyle/>
-          <a:p>
-            <a:pPr algn="l" indent="0" marL="0">
-              <a:lnSpc>
-                <a:spcPct val="135000"/>
-              </a:lnSpc>
-              <a:buNone/>
-            </a:pPr>
-            <a:r>
-              <a:rPr lang="ja-JP" altLang="en-US" sz="2000" b="1" dirty="0">
-                <a:solidFill>
-                  <a:srgbClr val="293E46"/>
-                </a:solidFill>
-                <a:latin typeface="BIZ UDPGothic" pitchFamily="34" charset="0"/>
-                <a:ea typeface="BIZ UDPGothic" pitchFamily="34" charset="-122"/>
-                <a:cs typeface="BIZ UDPGothic" pitchFamily="34" charset="-120"/>
-              </a:rPr>
-              <a:t>If counted</a:t>
-            </a:r>
-            <a:endParaRPr lang="ja-JP" sz="2000" dirty="0"/>
-          </a:p>
-        </p:txBody>
-      </p:sp>
-      <p:sp>
-        <p:nvSpPr>
-          <p:cNvPr id="8" name="Text 9"/>
-          <p:cNvSpPr/>
-          <p:nvPr>
-            <p:ph idx="114" type="body" hasCustomPrompt="1"/>
-          </p:nvPr>
-        </p:nvSpPr>
-        <p:spPr>
-          <a:xfrm>
-            <a:off x="3683000" y="3810000"/>
-            <a:ext cx="7645400" cy="812800"/>
-          </a:xfrm>
-          <a:prstGeom prst="rect">
-            <a:avLst/>
-          </a:prstGeom>
-          <a:noFill/>
-          <a:ln/>
-        </p:spPr>
-        <p:txBody>
-          <a:bodyPr wrap="square" lIns="0" tIns="0" rIns="0" bIns="0" rtlCol="0" anchor="t"/>
-          <a:lstStyle/>
-          <a:p>
-            <a:pPr algn="l" indent="0" marL="0">
-              <a:lnSpc>
-                <a:spcPct val="135000"/>
-              </a:lnSpc>
-              <a:buNone/>
-            </a:pPr>
-            <a:r>
-              <a:rPr lang="ja-JP" altLang="en-US" sz="2000" dirty="0">
-                <a:solidFill>
-                  <a:srgbClr val="293E46"/>
-                </a:solidFill>
-                <a:latin typeface="BIZ UDPGothic" pitchFamily="34" charset="0"/>
-                <a:ea typeface="BIZ UDPGothic" pitchFamily="34" charset="-122"/>
-                <a:cs typeface="BIZ UDPGothic" pitchFamily="34" charset="-120"/>
-              </a:rPr>
-              <a:t>If in-house counts decided hub status, how would CCTSI and its partners change? (Q3)</a:t>
-            </a:r>
-            <a:endParaRPr lang="ja-JP" sz="2000" dirty="0"/>
-          </a:p>
-        </p:txBody>
-      </p:sp>
-      <p:sp>
-        <p:nvSpPr>
-          <p:cNvPr id="9" name="Text 11"/>
-          <p:cNvSpPr/>
-          <p:nvPr>
-            <p:ph idx="117" type="body" hasCustomPrompt="1"/>
-          </p:nvPr>
-        </p:nvSpPr>
-        <p:spPr>
-          <a:xfrm>
-            <a:off x="1270000" y="5181600"/>
-            <a:ext cx="2159000" cy="381000"/>
-          </a:xfrm>
-          <a:prstGeom prst="rect">
-            <a:avLst/>
-          </a:prstGeom>
-          <a:noFill/>
-          <a:ln/>
-        </p:spPr>
-        <p:txBody>
-          <a:bodyPr wrap="square" lIns="0" tIns="0" rIns="0" bIns="0" rtlCol="0" anchor="t"/>
-          <a:lstStyle/>
-          <a:p>
-            <a:pPr algn="l" indent="0" marL="0">
-              <a:lnSpc>
-                <a:spcPct val="135000"/>
-              </a:lnSpc>
-              <a:buNone/>
-            </a:pPr>
-            <a:r>
-              <a:rPr lang="ja-JP" altLang="en-US" sz="2000" b="1" dirty="0">
-                <a:solidFill>
-                  <a:srgbClr val="293E46"/>
-                </a:solidFill>
-                <a:latin typeface="BIZ UDPGothic" pitchFamily="34" charset="0"/>
-                <a:ea typeface="BIZ UDPGothic" pitchFamily="34" charset="-122"/>
-                <a:cs typeface="BIZ UDPGothic" pitchFamily="34" charset="-120"/>
-              </a:rPr>
-              <a:t>Hub, ARO</a:t>
-            </a:r>
-            <a:endParaRPr lang="ja-JP" sz="2000" dirty="0"/>
-          </a:p>
-        </p:txBody>
-      </p:sp>
-      <p:sp>
-        <p:nvSpPr>
-          <p:cNvPr id="10" name="Text 11"/>
-          <p:cNvSpPr/>
-          <p:nvPr>
-            <p:ph idx="118" type="body" hasCustomPrompt="1"/>
-          </p:nvPr>
-        </p:nvSpPr>
-        <p:spPr>
-          <a:xfrm>
-            <a:off x="3683000" y="5181600"/>
-            <a:ext cx="7645400" cy="812800"/>
-          </a:xfrm>
-          <a:prstGeom prst="rect">
-            <a:avLst/>
-          </a:prstGeom>
-          <a:noFill/>
-          <a:ln/>
-        </p:spPr>
-        <p:txBody>
-          <a:bodyPr wrap="square" lIns="0" tIns="0" rIns="0" bIns="0" rtlCol="0" anchor="t"/>
-          <a:lstStyle/>
-          <a:p>
-            <a:pPr algn="l" indent="0" marL="0">
-              <a:lnSpc>
-                <a:spcPct val="135000"/>
-              </a:lnSpc>
-              <a:buNone/>
-            </a:pPr>
-            <a:r>
-              <a:rPr lang="ja-JP" altLang="en-US" sz="2000" dirty="0">
-                <a:solidFill>
-                  <a:srgbClr val="293E46"/>
-                </a:solidFill>
-                <a:latin typeface="BIZ UDPGothic" pitchFamily="34" charset="0"/>
-                <a:ea typeface="BIZ UDPGothic" pitchFamily="34" charset="-122"/>
-                <a:cs typeface="BIZ UDPGothic" pitchFamily="34" charset="-120"/>
-              </a:rPr>
-              <a:t>At Duke the CTSA hub and DCRI barely meet. How do CCTSI and CPC relate?</a:t>
-            </a:r>
-            <a:endParaRPr lang="ja-JP" sz="2000" dirty="0"/>
-          </a:p>
-        </p:txBody>
-      </p:sp>
-    </p:spTree>
-  </p:cSld>
-  <p:clrMapOvr>
-    <a:masterClrMapping/>
-  </p:clrMapOvr>
-</p:sld>
-</file>
-
-<file path=ppt/slides/slide11.xml><?xml version="1.0" encoding="utf-8"?>
-<p:sld xmlns:a="http://schemas.openxmlformats.org/drawingml/2006/main" xmlns:r="http://schemas.openxmlformats.org/officeDocument/2006/relationships" xmlns:p="http://schemas.openxmlformats.org/presentationml/2006/main">
-  <p:cSld name="Slide 11">
-    <p:spTree>
-      <p:nvGrpSpPr>
-        <p:cNvPr id="1" name=""/>
-        <p:cNvGrpSpPr/>
-        <p:nvPr/>
-      </p:nvGrpSpPr>
-      <p:grpSpPr>
-        <a:xfrm>
-          <a:off x="0" y="0"/>
-          <a:ext cx="0" cy="0"/>
-          <a:chOff x="0" y="0"/>
-          <a:chExt cx="0" cy="0"/>
-        </a:xfrm>
-      </p:grpSpPr>
-      <p:sp>
-        <p:nvSpPr>
-          <p:cNvPr id="2" name="Text 6"/>
-          <p:cNvSpPr/>
-          <p:nvPr>
-            <p:ph idx="107" type="title" hasCustomPrompt="1"/>
-          </p:nvPr>
-        </p:nvSpPr>
-        <p:spPr>
-          <a:xfrm>
-            <a:off x="1016000" y="2667000"/>
-            <a:ext cx="10160000" cy="736600"/>
-          </a:xfrm>
-          <a:prstGeom prst="rect">
-            <a:avLst/>
-          </a:prstGeom>
-          <a:noFill/>
-          <a:ln/>
-        </p:spPr>
-        <p:txBody>
-          <a:bodyPr wrap="square" lIns="0" tIns="0" rIns="0" bIns="0" rtlCol="0" anchor="t"/>
-          <a:lstStyle/>
-          <a:p>
-            <a:pPr algn="l" indent="0" marL="0">
-              <a:lnSpc>
-                <a:spcPct val="120000"/>
-              </a:lnSpc>
-              <a:buNone/>
-            </a:pPr>
-            <a:r>
-              <a:rPr lang="ja-JP" altLang="en-US" sz="3800" b="1" dirty="0">
-                <a:solidFill>
-                  <a:srgbClr val="293E46"/>
-                </a:solidFill>
-                <a:latin typeface="BIZ UDPGothic" pitchFamily="34" charset="0"/>
-                <a:ea typeface="BIZ UDPGothic" pitchFamily="34" charset="-122"/>
-                <a:cs typeface="BIZ UDPGothic" pitchFamily="34" charset="-120"/>
-              </a:rPr>
-              <a:t>Thank you</a:t>
-            </a:r>
-            <a:endParaRPr lang="ja-JP" sz="3800" dirty="0"/>
-          </a:p>
-        </p:txBody>
-      </p:sp>
-      <p:sp>
-        <p:nvSpPr>
-          <p:cNvPr id="3" name="Text 6"/>
-          <p:cNvSpPr/>
-          <p:nvPr>
-            <p:ph idx="108" type="body" hasCustomPrompt="1"/>
-          </p:nvPr>
-        </p:nvSpPr>
-        <p:spPr>
-          <a:xfrm>
-            <a:off x="1028700" y="3632200"/>
-            <a:ext cx="10134600" cy="457200"/>
-          </a:xfrm>
-          <a:prstGeom prst="rect">
-            <a:avLst/>
-          </a:prstGeom>
-          <a:noFill/>
-          <a:ln/>
-        </p:spPr>
-        <p:txBody>
-          <a:bodyPr wrap="square" lIns="0" tIns="0" rIns="0" bIns="0" rtlCol="0" anchor="t"/>
-          <a:lstStyle/>
-          <a:p>
-            <a:pPr algn="l" indent="0" marL="0">
-              <a:lnSpc>
-                <a:spcPct val="135000"/>
-              </a:lnSpc>
-              <a:buNone/>
-            </a:pPr>
-            <a:r>
-              <a:rPr lang="ja-JP" altLang="en-US" sz="2200" dirty="0">
-                <a:solidFill>
-                  <a:srgbClr val="293E46"/>
-                </a:solidFill>
-                <a:latin typeface="BIZ UDPGothic" pitchFamily="34" charset="0"/>
-                <a:ea typeface="BIZ UDPGothic" pitchFamily="34" charset="-122"/>
-                <a:cs typeface="BIZ UDPGothic" pitchFamily="34" charset="-120"/>
-              </a:rPr>
-              <a:t>toshikisaito@g.ecc.u-tokyo.ac.jp</a:t>
-            </a:r>
-            <a:endParaRPr lang="ja-JP" sz="2200" dirty="0"/>
-          </a:p>
-        </p:txBody>
-      </p:sp>
-      <p:sp>
-        <p:nvSpPr>
-          <p:cNvPr id="4" name="Text 8"/>
-          <p:cNvSpPr/>
-          <p:nvPr>
-            <p:ph idx="111" type="body" hasCustomPrompt="1"/>
-          </p:nvPr>
-        </p:nvSpPr>
-        <p:spPr>
-          <a:xfrm>
-            <a:off x="609600" y="5435600"/>
-            <a:ext cx="3810000" cy="330200"/>
-          </a:xfrm>
-          <a:prstGeom prst="rect">
-            <a:avLst/>
-          </a:prstGeom>
-          <a:noFill/>
-          <a:ln/>
-        </p:spPr>
-        <p:txBody>
-          <a:bodyPr wrap="square" lIns="0" tIns="0" rIns="0" bIns="0" rtlCol="0" anchor="t"/>
-          <a:lstStyle/>
-          <a:p>
-            <a:pPr algn="l" indent="0" marL="0">
-              <a:lnSpc>
-                <a:spcPct val="135000"/>
-              </a:lnSpc>
-              <a:buNone/>
-            </a:pPr>
-            <a:r>
-              <a:rPr lang="ja-JP" altLang="en-US" sz="1700" b="1" dirty="0">
-                <a:solidFill>
-                  <a:srgbClr val="293E46"/>
-                </a:solidFill>
-                <a:latin typeface="BIZ UDPGothic" pitchFamily="34" charset="0"/>
-                <a:ea typeface="BIZ UDPGothic" pitchFamily="34" charset="-122"/>
-                <a:cs typeface="BIZ UDPGothic" pitchFamily="34" charset="-120"/>
-              </a:rPr>
-              <a:t>T. Saito</a:t>
-            </a:r>
-            <a:endParaRPr lang="ja-JP" sz="1700" dirty="0"/>
-          </a:p>
-        </p:txBody>
-      </p:sp>
-      <p:sp>
-        <p:nvSpPr>
-          <p:cNvPr id="5" name="Text 8"/>
-          <p:cNvSpPr/>
-          <p:nvPr>
-            <p:ph idx="112" type="body" hasCustomPrompt="1"/>
-          </p:nvPr>
-        </p:nvSpPr>
-        <p:spPr>
-          <a:xfrm>
-            <a:off x="609600" y="5791200"/>
-            <a:ext cx="8001000" cy="279400"/>
-          </a:xfrm>
-          <a:prstGeom prst="rect">
-            <a:avLst/>
-          </a:prstGeom>
-          <a:noFill/>
-          <a:ln/>
-        </p:spPr>
-        <p:txBody>
-          <a:bodyPr wrap="square" lIns="0" tIns="0" rIns="0" bIns="0" rtlCol="0" anchor="t"/>
-          <a:lstStyle/>
-          <a:p>
-            <a:pPr algn="l" indent="0" marL="0">
-              <a:lnSpc>
-                <a:spcPct val="135000"/>
-              </a:lnSpc>
-              <a:buNone/>
-            </a:pPr>
-            <a:r>
-              <a:rPr lang="ja-JP" altLang="en-US" sz="1200" dirty="0">
-                <a:solidFill>
-                  <a:srgbClr val="64777D"/>
-                </a:solidFill>
-                <a:latin typeface="BIZ UDPGothic" pitchFamily="34" charset="0"/>
-                <a:ea typeface="BIZ UDPGothic" pitchFamily="34" charset="-122"/>
-                <a:cs typeface="BIZ UDPGothic" pitchFamily="34" charset="-120"/>
-              </a:rPr>
-              <a:t>CRPC, UTokyo Hospital</a:t>
-            </a:r>
-            <a:endParaRPr lang="ja-JP" sz="1200" dirty="0"/>
-          </a:p>
-        </p:txBody>
-      </p:sp>
-      <p:sp>
-        <p:nvSpPr>
-          <p:cNvPr id="6" name="Text 8"/>
-          <p:cNvSpPr/>
-          <p:nvPr>
-            <p:ph idx="113" type="body" hasCustomPrompt="1"/>
-          </p:nvPr>
-        </p:nvSpPr>
-        <p:spPr>
-          <a:xfrm>
-            <a:off x="8915400" y="5486400"/>
-            <a:ext cx="2667000" cy="304800"/>
-          </a:xfrm>
-          <a:prstGeom prst="rect">
-            <a:avLst/>
-          </a:prstGeom>
-          <a:noFill/>
-          <a:ln/>
-        </p:spPr>
-        <p:txBody>
-          <a:bodyPr wrap="square" lIns="0" tIns="0" rIns="0" bIns="0" rtlCol="0" anchor="t"/>
-          <a:lstStyle/>
-          <a:p>
-            <a:pPr algn="r" indent="0" marL="0">
-              <a:lnSpc>
-                <a:spcPct val="135000"/>
-              </a:lnSpc>
-              <a:buNone/>
-            </a:pPr>
-            <a:r>
-              <a:rPr lang="ja-JP" altLang="en-US" sz="1200" dirty="0">
-                <a:solidFill>
-                  <a:srgbClr val="64777D"/>
-                </a:solidFill>
-                <a:latin typeface="BIZ UDPGothic" pitchFamily="34" charset="0"/>
-                <a:ea typeface="BIZ UDPGothic" pitchFamily="34" charset="-122"/>
-                <a:cs typeface="BIZ UDPGothic" pitchFamily="34" charset="-120"/>
-              </a:rPr>
-              <a:t>Durham · Aurora · Nashville</a:t>
-            </a:r>
-            <a:endParaRPr lang="ja-JP" sz="1200" dirty="0"/>
-          </a:p>
-        </p:txBody>
-      </p:sp>
-      <p:sp>
-        <p:nvSpPr>
-          <p:cNvPr id="7" name="Text 5"/>
-          <p:cNvSpPr/>
-          <p:nvPr/>
-        </p:nvSpPr>
-        <p:spPr>
-          <a:xfrm>
-            <a:off x="11125200" y="6451600"/>
-            <a:ext cx="457200" cy="254000"/>
-          </a:xfrm>
-          <a:prstGeom prst="rect">
-            <a:avLst/>
-          </a:prstGeom>
-          <a:noFill/>
-          <a:ln/>
-        </p:spPr>
-        <p:txBody>
-          <a:bodyPr wrap="square" lIns="0" tIns="0" rIns="0" bIns="0" rtlCol="0" anchor="t"/>
-          <a:lstStyle/>
-          <a:p>
-            <a:pPr algn="r" indent="0" marL="0">
-              <a:lnSpc>
-                <a:spcPct val="135000"/>
-              </a:lnSpc>
-              <a:buNone/>
-            </a:pPr>
-            <a:r>
-              <a:rPr lang="ja-JP" altLang="en-US" sz="1000" dirty="0">
-                <a:solidFill>
-                  <a:srgbClr val="64777D"/>
-                </a:solidFill>
-                <a:latin typeface="Arial" pitchFamily="34" charset="0"/>
-                <a:ea typeface="Arial" pitchFamily="34" charset="-122"/>
-                <a:cs typeface="Arial" pitchFamily="34" charset="-120"/>
-              </a:rPr>
-              <a:t>11</a:t>
             </a:r>
             <a:endParaRPr lang="ja-JP" sz="1000" dirty="0"/>
           </a:p>
@@ -7732,7 +7224,7 @@
                 <a:ea typeface="BIZ UDPGothic" pitchFamily="34" charset="-122"/>
                 <a:cs typeface="BIZ UDPGothic" pitchFamily="34" charset="-120"/>
               </a:rPr>
-              <a:t>From trial counts</a:t>
+              <a:t>From trials started</a:t>
             </a:r>
             <a:endParaRPr lang="ja-JP" sz="2000" dirty="0"/>
           </a:p>
@@ -7752,7 +7244,7 @@
                 <a:ea typeface="BIZ UDPGothic" pitchFamily="34" charset="-122"/>
                 <a:cs typeface="BIZ UDPGothic" pitchFamily="34" charset="-120"/>
               </a:rPr>
-              <a:t>to approvals.</a:t>
+              <a:t>to results.</a:t>
             </a:r>
             <a:endParaRPr lang="ja-JP" sz="2000" dirty="0"/>
           </a:p>
@@ -8081,7 +7573,7 @@
                 <a:ea typeface="BIZ UDPGothic" pitchFamily="34" charset="-122"/>
                 <a:cs typeface="BIZ UDPGothic" pitchFamily="34" charset="-120"/>
               </a:rPr>
-              <a:t>Measured by our own yardstick</a:t>
+              <a:t>What we came to ask</a:t>
             </a:r>
             <a:endParaRPr lang="ja-JP" sz="2600" dirty="0"/>
           </a:p>
@@ -8167,7 +7659,7 @@
                 <a:ea typeface="BIZ UDPGothic" pitchFamily="34" charset="-122"/>
                 <a:cs typeface="BIZ UDPGothic" pitchFamily="34" charset="-120"/>
               </a:rPr>
-              <a:t>Apply the proposed axis to ourselves. None of this counts today; all of it enabled others' research.</a:t>
+              <a:t>Thirteen written questions in seven themes; you have grouped the answers for 10:10. DCRI sharpened three.</a:t>
             </a:r>
             <a:endParaRPr lang="ja-JP" sz="2000" dirty="0"/>
           </a:p>
@@ -8211,7 +7703,7 @@
                 <a:ea typeface="BIZ UDPGothic" pitchFamily="34" charset="-122"/>
                 <a:cs typeface="BIZ UDPGothic" pitchFamily="34" charset="-120"/>
               </a:rPr>
-              <a:t>Ptosh</a:t>
+              <a:t>Value</a:t>
             </a:r>
             <a:endParaRPr lang="ja-JP" sz="2000" dirty="0"/>
           </a:p>
@@ -8255,7 +7747,7 @@
                 <a:ea typeface="BIZ UDPGothic" pitchFamily="34" charset="-122"/>
                 <a:cs typeface="BIZ UDPGothic" pitchFamily="34" charset="-120"/>
               </a:rPr>
-              <a:t>EDC platform for academic trials; CDISC encoded at data entry.</a:t>
+              <a:t>Which numbers NCATS reacts to; how partners' research is credited (A–C).</a:t>
             </a:r>
             <a:endParaRPr lang="ja-JP" sz="2000" dirty="0"/>
           </a:p>
@@ -8299,7 +7791,7 @@
                 <a:ea typeface="BIZ UDPGothic" pitchFamily="34" charset="-122"/>
                 <a:cs typeface="BIZ UDPGothic" pitchFamily="34" charset="-120"/>
               </a:rPr>
-              <a:t>NHO</a:t>
+              <a:t>People</a:t>
             </a:r>
             <a:endParaRPr lang="ja-JP" sz="2000" dirty="0"/>
           </a:p>
@@ -8343,7 +7835,7 @@
                 <a:ea typeface="BIZ UDPGothic" pitchFamily="34" charset="-122"/>
                 <a:cs typeface="BIZ UDPGothic" pitchFamily="34" charset="-120"/>
               </a:rPr>
-              <a:t>CDISC adopted across the National Hospital Organization's multicenter trials.</a:t>
+              <a:t>Support workforce and retention; at DCRI, culture and turnover under 6% (D).</a:t>
             </a:r>
             <a:endParaRPr lang="ja-JP" sz="2000" dirty="0"/>
           </a:p>
@@ -8387,7 +7879,7 @@
                 <a:ea typeface="BIZ UDPGothic" pitchFamily="34" charset="-122"/>
                 <a:cs typeface="BIZ UDPGothic" pitchFamily="34" charset="-120"/>
               </a:rPr>
-              <a:t>aCRF.jp</a:t>
+              <a:t>System</a:t>
             </a:r>
             <a:endParaRPr lang="ja-JP" sz="2000" dirty="0"/>
           </a:p>
@@ -8431,7 +7923,7 @@
                 <a:ea typeface="BIZ UDPGothic" pitchFamily="34" charset="-122"/>
                 <a:cs typeface="BIZ UDPGothic" pitchFamily="34" charset="-120"/>
               </a:rPr>
-              <a:t>Open annotated CRF library, and the JASPEHR group on EHR-to-research data.</a:t>
+              <a:t>How the hub relates to the AROs around it, and to data standards (E–G).</a:t>
             </a:r>
             <a:endParaRPr lang="ja-JP" sz="2000" dirty="0"/>
           </a:p>
@@ -8500,7 +7992,7 @@
                 <a:ea typeface="BIZ UDPGothic" pitchFamily="34" charset="-122"/>
                 <a:cs typeface="BIZ UDPGothic" pitchFamily="34" charset="-120"/>
               </a:rPr>
-              <a:t>What we came to ask</a:t>
+              <a:t>What we most want to learn</a:t>
             </a:r>
             <a:endParaRPr lang="ja-JP" sz="2600" dirty="0"/>
           </a:p>
@@ -8586,7 +8078,7 @@
                 <a:ea typeface="BIZ UDPGothic" pitchFamily="34" charset="-122"/>
                 <a:cs typeface="BIZ UDPGothic" pitchFamily="34" charset="-120"/>
               </a:rPr>
-              <a:t>Thirteen written questions in seven themes; you have grouped the answers for 10:10. DCRI sharpened three.</a:t>
+              <a:t>One question is about the review; two are specific to you.</a:t>
             </a:r>
             <a:endParaRPr lang="ja-JP" sz="2000" dirty="0"/>
           </a:p>
@@ -8630,7 +8122,7 @@
                 <a:ea typeface="BIZ UDPGothic" pitchFamily="34" charset="-122"/>
                 <a:cs typeface="BIZ UDPGothic" pitchFamily="34" charset="-120"/>
               </a:rPr>
-              <a:t>Value</a:t>
+              <a:t>Review</a:t>
             </a:r>
             <a:endParaRPr lang="ja-JP" sz="2000" dirty="0"/>
           </a:p>
@@ -8674,7 +8166,7 @@
                 <a:ea typeface="BIZ UDPGothic" pitchFamily="34" charset="-122"/>
                 <a:cs typeface="BIZ UDPGothic" pitchFamily="34" charset="-120"/>
               </a:rPr>
-              <a:t>Which numbers NCATS reacts to; how partners' research is credited (A–C).</a:t>
+              <a:t>What decided your last renewal; which report numbers has NCATS acted on?</a:t>
             </a:r>
             <a:endParaRPr lang="ja-JP" sz="2000" dirty="0"/>
           </a:p>
@@ -8718,7 +8210,7 @@
                 <a:ea typeface="BIZ UDPGothic" pitchFamily="34" charset="-122"/>
                 <a:cs typeface="BIZ UDPGothic" pitchFamily="34" charset="-120"/>
               </a:rPr>
-              <a:t>People</a:t>
+              <a:t>If counted</a:t>
             </a:r>
             <a:endParaRPr lang="ja-JP" sz="2000" dirty="0"/>
           </a:p>
@@ -8762,7 +8254,7 @@
                 <a:ea typeface="BIZ UDPGothic" pitchFamily="34" charset="-122"/>
                 <a:cs typeface="BIZ UDPGothic" pitchFamily="34" charset="-120"/>
               </a:rPr>
-              <a:t>Support workforce and retention; at DCRI, culture and turnover under 6% (D).</a:t>
+              <a:t>If in-house counts decided hub status, how would CCTSI and its partners change? (Q3)</a:t>
             </a:r>
             <a:endParaRPr lang="ja-JP" sz="2000" dirty="0"/>
           </a:p>
@@ -8806,7 +8298,7 @@
                 <a:ea typeface="BIZ UDPGothic" pitchFamily="34" charset="-122"/>
                 <a:cs typeface="BIZ UDPGothic" pitchFamily="34" charset="-120"/>
               </a:rPr>
-              <a:t>System</a:t>
+              <a:t>Hub, ARO</a:t>
             </a:r>
             <a:endParaRPr lang="ja-JP" sz="2000" dirty="0"/>
           </a:p>
@@ -8850,7 +8342,7 @@
                 <a:ea typeface="BIZ UDPGothic" pitchFamily="34" charset="-122"/>
                 <a:cs typeface="BIZ UDPGothic" pitchFamily="34" charset="-120"/>
               </a:rPr>
-              <a:t>How the hub relates to the AROs around it, and to data standards (E–G).</a:t>
+              <a:t>At Duke the CTSA hub and DCRI barely meet. How do CCTSI and CPC relate?</a:t>
             </a:r>
             <a:endParaRPr lang="ja-JP" sz="2000" dirty="0"/>
           </a:p>
